--- a/Slide.pptx
+++ b/Slide.pptx
@@ -394,158 +394,7 @@
           <a:bodyPr/>
           <a:lstStyle/>
           <a:p>
-            <a:r>
-              <a:rPr dirty="0" err="1"/>
-              <a:t>Giải</a:t>
-            </a:r>
-            <a:r>
-              <a:rPr dirty="0"/>
-              <a:t> </a:t>
-            </a:r>
-            <a:r>
-              <a:rPr dirty="0" err="1"/>
-              <a:t>thích</a:t>
-            </a:r>
-            <a:r>
-              <a:rPr dirty="0"/>
-              <a:t> </a:t>
-            </a:r>
-            <a:r>
-              <a:rPr dirty="0" err="1"/>
-              <a:t>vì</a:t>
-            </a:r>
-            <a:r>
-              <a:rPr dirty="0"/>
-              <a:t> </a:t>
-            </a:r>
-            <a:r>
-              <a:rPr dirty="0" err="1"/>
-              <a:t>sao</a:t>
-            </a:r>
-            <a:r>
-              <a:rPr dirty="0"/>
-              <a:t> </a:t>
-            </a:r>
-            <a:r>
-              <a:rPr dirty="0" err="1"/>
-              <a:t>khuyến</a:t>
-            </a:r>
-            <a:r>
-              <a:rPr dirty="0"/>
-              <a:t> </a:t>
-            </a:r>
-            <a:r>
-              <a:rPr dirty="0" err="1"/>
-              <a:t>nghị</a:t>
-            </a:r>
-            <a:r>
-              <a:rPr dirty="0"/>
-              <a:t> </a:t>
-            </a:r>
-            <a:r>
-              <a:rPr dirty="0" err="1"/>
-              <a:t>cố</a:t>
-            </a:r>
-            <a:r>
-              <a:rPr dirty="0"/>
-              <a:t> </a:t>
-            </a:r>
-            <a:r>
-              <a:rPr dirty="0" err="1"/>
-              <a:t>tình</a:t>
-            </a:r>
-            <a:r>
-              <a:rPr dirty="0"/>
-              <a:t> </a:t>
-            </a:r>
-            <a:r>
-              <a:rPr dirty="0" err="1"/>
-              <a:t>dùng</a:t>
-            </a:r>
-            <a:r>
-              <a:rPr dirty="0"/>
-              <a:t> rule </a:t>
-            </a:r>
-            <a:r>
-              <a:rPr dirty="0" err="1"/>
-              <a:t>chứ</a:t>
-            </a:r>
-            <a:r>
-              <a:rPr dirty="0"/>
-              <a:t> </a:t>
-            </a:r>
-            <a:r>
-              <a:rPr dirty="0" err="1"/>
-              <a:t>không</a:t>
-            </a:r>
-            <a:r>
-              <a:rPr dirty="0"/>
-              <a:t> ML — </a:t>
-            </a:r>
-            <a:r>
-              <a:rPr dirty="0" err="1"/>
-              <a:t>tránh</a:t>
-            </a:r>
-            <a:r>
-              <a:rPr dirty="0"/>
-              <a:t> </a:t>
-            </a:r>
-            <a:r>
-              <a:rPr dirty="0" err="1"/>
-              <a:t>sinh</a:t>
-            </a:r>
-            <a:r>
-              <a:rPr dirty="0"/>
-              <a:t> </a:t>
-            </a:r>
-            <a:r>
-              <a:rPr dirty="0" err="1"/>
-              <a:t>lời</a:t>
-            </a:r>
-            <a:r>
-              <a:rPr dirty="0"/>
-              <a:t> </a:t>
-            </a:r>
-            <a:r>
-              <a:rPr dirty="0" err="1"/>
-              <a:t>khuyên</a:t>
-            </a:r>
-            <a:r>
-              <a:rPr dirty="0"/>
-              <a:t> y </a:t>
-            </a:r>
-            <a:r>
-              <a:rPr dirty="0" err="1"/>
-              <a:t>tế</a:t>
-            </a:r>
-            <a:r>
-              <a:rPr dirty="0"/>
-              <a:t> </a:t>
-            </a:r>
-            <a:r>
-              <a:rPr dirty="0" err="1"/>
-              <a:t>không</a:t>
-            </a:r>
-            <a:r>
-              <a:rPr dirty="0"/>
-              <a:t> </a:t>
-            </a:r>
-            <a:r>
-              <a:rPr dirty="0" err="1"/>
-              <a:t>kiểm</a:t>
-            </a:r>
-            <a:r>
-              <a:rPr dirty="0"/>
-              <a:t> </a:t>
-            </a:r>
-            <a:r>
-              <a:rPr dirty="0" err="1"/>
-              <a:t>soát</a:t>
-            </a:r>
-            <a:r>
-              <a:rPr dirty="0"/>
-              <a:t>.</a:t>
-            </a:r>
+            <a:endParaRPr dirty="0"/>
           </a:p>
         </p:txBody>
       </p:sp>
@@ -6223,79 +6072,7 @@
                 </a:solidFill>
                 <a:latin typeface="Arial"/>
               </a:rPr>
-              <a:t>3</a:t>
-            </a:r>
-            <a:r>
-              <a:rPr sz="2600" b="1" dirty="0">
-                <a:solidFill>
-                  <a:srgbClr val="FFFFFF"/>
-                </a:solidFill>
-                <a:latin typeface="Arial"/>
-              </a:rPr>
-              <a:t>. </a:t>
-            </a:r>
-            <a:r>
-              <a:rPr sz="2600" b="1" dirty="0" err="1">
-                <a:solidFill>
-                  <a:srgbClr val="FFFFFF"/>
-                </a:solidFill>
-                <a:latin typeface="Arial"/>
-              </a:rPr>
-              <a:t>Giải</a:t>
-            </a:r>
-            <a:r>
-              <a:rPr sz="2600" b="1" dirty="0">
-                <a:solidFill>
-                  <a:srgbClr val="FFFFFF"/>
-                </a:solidFill>
-                <a:latin typeface="Arial"/>
-              </a:rPr>
-              <a:t> </a:t>
-            </a:r>
-            <a:r>
-              <a:rPr sz="2600" b="1" dirty="0" err="1">
-                <a:solidFill>
-                  <a:srgbClr val="FFFFFF"/>
-                </a:solidFill>
-                <a:latin typeface="Arial"/>
-              </a:rPr>
-              <a:t>pháp</a:t>
-            </a:r>
-            <a:r>
-              <a:rPr sz="2600" b="1" dirty="0">
-                <a:solidFill>
-                  <a:srgbClr val="FFFFFF"/>
-                </a:solidFill>
-                <a:latin typeface="Arial"/>
-              </a:rPr>
-              <a:t> </a:t>
-            </a:r>
-            <a:r>
-              <a:rPr sz="2600" b="1" dirty="0" err="1">
-                <a:solidFill>
-                  <a:srgbClr val="FFFFFF"/>
-                </a:solidFill>
-                <a:latin typeface="Arial"/>
-              </a:rPr>
-              <a:t>hệ</a:t>
-            </a:r>
-            <a:r>
-              <a:rPr sz="2600" b="1" dirty="0">
-                <a:solidFill>
-                  <a:srgbClr val="FFFFFF"/>
-                </a:solidFill>
-                <a:latin typeface="Arial"/>
-              </a:rPr>
-              <a:t> </a:t>
-            </a:r>
-            <a:r>
-              <a:rPr sz="2600" b="1" dirty="0" err="1">
-                <a:solidFill>
-                  <a:srgbClr val="FFFFFF"/>
-                </a:solidFill>
-                <a:latin typeface="Arial"/>
-              </a:rPr>
-              <a:t>thống</a:t>
+              <a:t>4. Chủ đề liên quan</a:t>
             </a:r>
             <a:endParaRPr lang="en-US" sz="2600" b="1" dirty="0">
               <a:solidFill>
@@ -6339,62 +6116,17 @@
                 </a:solidFill>
                 <a:latin typeface="Arial"/>
               </a:rPr>
-              <a:t>: </a:t>
-            </a:r>
-            <a:r>
-              <a:rPr lang="en-US" sz="1300" i="1" dirty="0" err="1">
-                <a:solidFill>
-                  <a:srgbClr val="CFE3EC"/>
-                </a:solidFill>
-                <a:latin typeface="Arial"/>
-              </a:rPr>
-              <a:t>Triều</a:t>
-            </a:r>
-            <a:endParaRPr lang="en-US" sz="1300" i="1" dirty="0">
-              <a:solidFill>
-                <a:srgbClr val="CFE3EC"/>
-              </a:solidFill>
-              <a:latin typeface="Arial"/>
-            </a:endParaRPr>
+              <a:t>: Thông</a:t>
+            </a:r>
           </a:p>
         </p:txBody>
       </p:sp>
-      <p:pic>
-        <p:nvPicPr>
-          <p:cNvPr id="8" name="Picture 7">
+      <p:sp>
+        <p:nvSpPr>
+          <p:cNvPr id="5" name="TextBox 4">
             <a:extLst>
               <a:ext uri="{FF2B5EF4-FFF2-40B4-BE49-F238E27FC236}">
-                <a16:creationId xmlns:a16="http://schemas.microsoft.com/office/drawing/2014/main" id="{328D1180-5E79-E22E-3A27-DDABD3975723}"/>
-              </a:ext>
-            </a:extLst>
-          </p:cNvPr>
-          <p:cNvPicPr>
-            <a:picLocks noChangeAspect="1"/>
-          </p:cNvPicPr>
-          <p:nvPr/>
-        </p:nvPicPr>
-        <p:blipFill>
-          <a:blip r:embed="rId3"/>
-          <a:stretch>
-            <a:fillRect/>
-          </a:stretch>
-        </p:blipFill>
-        <p:spPr>
-          <a:xfrm>
-            <a:off x="1992994" y="1538009"/>
-            <a:ext cx="8205705" cy="4261128"/>
-          </a:xfrm>
-          <a:prstGeom prst="rect">
-            <a:avLst/>
-          </a:prstGeom>
-        </p:spPr>
-      </p:pic>
-      <p:sp>
-        <p:nvSpPr>
-          <p:cNvPr id="3" name="TextBox 2">
-            <a:extLst>
-              <a:ext uri="{FF2B5EF4-FFF2-40B4-BE49-F238E27FC236}">
-                <a16:creationId xmlns:a16="http://schemas.microsoft.com/office/drawing/2014/main" id="{02B2369E-F6DD-3374-483C-ED25CBC11465}"/>
+                <a16:creationId xmlns:a16="http://schemas.microsoft.com/office/drawing/2014/main" id="{F3680C46-82C4-AF84-3003-F39F142BCD3E}"/>
               </a:ext>
             </a:extLst>
           </p:cNvPr>
@@ -6403,88 +6135,8 @@
         </p:nvSpPr>
         <p:spPr>
           <a:xfrm>
-            <a:off x="119006" y="5876049"/>
-            <a:ext cx="9871028" cy="1123384"/>
-          </a:xfrm>
-          <a:prstGeom prst="rect">
-            <a:avLst/>
-          </a:prstGeom>
-          <a:noFill/>
-        </p:spPr>
-        <p:txBody>
-          <a:bodyPr wrap="square" rtlCol="0">
-            <a:spAutoFit/>
-          </a:bodyPr>
-          <a:lstStyle/>
-          <a:p>
-            <a:pPr lvl="1">
-              <a:spcAft>
-                <a:spcPts val="400"/>
-              </a:spcAft>
-            </a:pPr>
-            <a:r>
-              <a:rPr lang="vi-VN" sz="1300" dirty="0">
-                <a:solidFill>
-                  <a:srgbClr val="444B52"/>
-                </a:solidFill>
-                <a:latin typeface="Arial"/>
-              </a:rPr>
-              <a:t>–  Khuyến nghị dựa trên RULE (bảng tra cứu tĩnh), không dùng ML</a:t>
-            </a:r>
-          </a:p>
-          <a:p>
-            <a:pPr lvl="1">
-              <a:spcAft>
-                <a:spcPts val="400"/>
-              </a:spcAft>
-            </a:pPr>
-            <a:r>
-              <a:rPr lang="vi-VN" sz="1300" dirty="0">
-                <a:solidFill>
-                  <a:srgbClr val="444B52"/>
-                </a:solidFill>
-                <a:latin typeface="Arial"/>
-              </a:rPr>
-              <a:t>–  Ánh xạ theo mức rủi ro (LOW/MODERATE/HIGH) từng bệnh + tổng thể</a:t>
-            </a:r>
-          </a:p>
-          <a:p>
-            <a:pPr lvl="1">
-              <a:spcAft>
-                <a:spcPts val="400"/>
-              </a:spcAft>
-            </a:pPr>
-            <a:r>
-              <a:rPr lang="vi-VN" sz="1300" dirty="0">
-                <a:solidFill>
-                  <a:srgbClr val="444B52"/>
-                </a:solidFill>
-                <a:latin typeface="Arial"/>
-              </a:rPr>
-              <a:t>–  Ưu điểm: minh bạch, kiểm soát được, an toàn — phù hợp y tế; luôn kèm disclaimer</a:t>
-            </a:r>
-          </a:p>
-          <a:p>
-            <a:endParaRPr lang="en-VN" dirty="0"/>
-          </a:p>
-        </p:txBody>
-      </p:sp>
-      <p:sp>
-        <p:nvSpPr>
-          <p:cNvPr id="7" name="TextBox 6">
-            <a:extLst>
-              <a:ext uri="{FF2B5EF4-FFF2-40B4-BE49-F238E27FC236}">
-                <a16:creationId xmlns:a16="http://schemas.microsoft.com/office/drawing/2014/main" id="{973E3CCD-78EE-3A12-358D-46F18ECD2845}"/>
-              </a:ext>
-            </a:extLst>
-          </p:cNvPr>
-          <p:cNvSpPr txBox="1"/>
-          <p:nvPr/>
-        </p:nvSpPr>
-        <p:spPr>
-          <a:xfrm>
-            <a:off x="502918" y="1230232"/>
-            <a:ext cx="11185855" cy="323165"/>
+            <a:off x="364068" y="1267772"/>
+            <a:ext cx="8796865" cy="2939266"/>
           </a:xfrm>
           <a:prstGeom prst="rect">
             <a:avLst/>
@@ -6499,26 +6151,511 @@
           <a:p>
             <a:pPr>
               <a:spcAft>
-                <a:spcPts val="400"/>
+                <a:spcPts val="600"/>
               </a:spcAft>
             </a:pPr>
             <a:r>
-              <a:rPr lang="vi-VN" sz="1500" b="1" dirty="0">
+              <a:rPr lang="en-US" sz="1400" b="1" dirty="0">
                 <a:solidFill>
                   <a:srgbClr val="1B8A7A"/>
                 </a:solidFill>
                 <a:latin typeface="Arial"/>
               </a:rPr>
-              <a:t>App</a:t>
-            </a:r>
+              <a:t>•  2 </a:t>
+            </a:r>
+            <a:r>
+              <a:rPr lang="en-US" sz="1400" b="1" dirty="0" err="1">
+                <a:solidFill>
+                  <a:srgbClr val="1B8A7A"/>
+                </a:solidFill>
+                <a:latin typeface="Arial"/>
+              </a:rPr>
+              <a:t>cơ</a:t>
+            </a:r>
+            <a:r>
+              <a:rPr lang="en-US" sz="1400" b="1" dirty="0">
+                <a:solidFill>
+                  <a:srgbClr val="1B8A7A"/>
+                </a:solidFill>
+                <a:latin typeface="Arial"/>
+              </a:rPr>
+              <a:t> </a:t>
+            </a:r>
+            <a:r>
+              <a:rPr lang="en-US" sz="1400" b="1" dirty="0" err="1">
+                <a:solidFill>
+                  <a:srgbClr val="1B8A7A"/>
+                </a:solidFill>
+                <a:latin typeface="Arial"/>
+              </a:rPr>
+              <a:t>chế</a:t>
+            </a:r>
+            <a:r>
+              <a:rPr lang="en-US" sz="1400" b="1" dirty="0">
+                <a:solidFill>
+                  <a:srgbClr val="1B8A7A"/>
+                </a:solidFill>
+                <a:latin typeface="Arial"/>
+              </a:rPr>
+              <a:t> </a:t>
+            </a:r>
+            <a:r>
+              <a:rPr lang="en-US" sz="1400" b="1" dirty="0" err="1">
+                <a:solidFill>
+                  <a:srgbClr val="1B8A7A"/>
+                </a:solidFill>
+                <a:latin typeface="Arial"/>
+              </a:rPr>
+              <a:t>gán</a:t>
+            </a:r>
+            <a:r>
+              <a:rPr lang="en-US" sz="1400" b="1" dirty="0">
+                <a:solidFill>
+                  <a:srgbClr val="1B8A7A"/>
+                </a:solidFill>
+                <a:latin typeface="Arial"/>
+              </a:rPr>
+              <a:t> </a:t>
+            </a:r>
+            <a:r>
+              <a:rPr lang="en-US" sz="1400" b="1" dirty="0" err="1">
+                <a:solidFill>
+                  <a:srgbClr val="1B8A7A"/>
+                </a:solidFill>
+                <a:latin typeface="Arial"/>
+              </a:rPr>
+              <a:t>nhãn</a:t>
+            </a:r>
+            <a:r>
+              <a:rPr lang="en-US" sz="1400" b="1" dirty="0">
+                <a:solidFill>
+                  <a:srgbClr val="1B8A7A"/>
+                </a:solidFill>
+                <a:latin typeface="Arial"/>
+              </a:rPr>
+              <a:t> </a:t>
+            </a:r>
+            <a:r>
+              <a:rPr lang="en-US" sz="1400" b="1" dirty="0" err="1">
+                <a:solidFill>
+                  <a:srgbClr val="1B8A7A"/>
+                </a:solidFill>
+                <a:latin typeface="Arial"/>
+              </a:rPr>
+              <a:t>phân</a:t>
+            </a:r>
+            <a:r>
+              <a:rPr lang="en-US" sz="1400" b="1" dirty="0">
+                <a:solidFill>
+                  <a:srgbClr val="1B8A7A"/>
+                </a:solidFill>
+                <a:latin typeface="Arial"/>
+              </a:rPr>
+              <a:t> </a:t>
+            </a:r>
+            <a:r>
+              <a:rPr lang="en-US" sz="1400" b="1" dirty="0" err="1">
+                <a:solidFill>
+                  <a:srgbClr val="1B8A7A"/>
+                </a:solidFill>
+                <a:latin typeface="Arial"/>
+              </a:rPr>
+              <a:t>cụm</a:t>
+            </a:r>
+            <a:endParaRPr lang="en-US" sz="1400" b="1" dirty="0">
+              <a:solidFill>
+                <a:srgbClr val="1B8A7A"/>
+              </a:solidFill>
+              <a:latin typeface="Arial"/>
+            </a:endParaRPr>
+          </a:p>
+          <a:p>
+            <a:pPr marL="285750" indent="-285750">
+              <a:spcAft>
+                <a:spcPts val="600"/>
+              </a:spcAft>
+              <a:buFontTx/>
+              <a:buChar char="-"/>
+            </a:pPr>
+            <a:r>
+              <a:rPr lang="vi-VN" sz="1400" dirty="0">
+                <a:solidFill>
+                  <a:srgbClr val="444B52"/>
+                </a:solidFill>
+                <a:latin typeface="Arial"/>
+              </a:rPr>
+              <a:t>Phân cụm </a:t>
+            </a:r>
+            <a:r>
+              <a:rPr lang="vi-VN" sz="1400" dirty="0">
+                <a:solidFill>
+                  <a:srgbClr val="444B52"/>
+                </a:solidFill>
+                <a:highlight>
+                  <a:srgbClr val="FFFF00"/>
+                </a:highlight>
+                <a:latin typeface="Arial"/>
+              </a:rPr>
+              <a:t>cứng</a:t>
+            </a:r>
+            <a:r>
+              <a:rPr lang="vi-VN" sz="1400" dirty="0">
+                <a:solidFill>
+                  <a:srgbClr val="444B52"/>
+                </a:solidFill>
+                <a:latin typeface="Arial"/>
+              </a:rPr>
+              <a:t> (một datapoint thuộc đúng 1 cụm)</a:t>
+            </a:r>
+          </a:p>
+          <a:p>
+            <a:pPr marL="285750" indent="-285750">
+              <a:spcAft>
+                <a:spcPts val="600"/>
+              </a:spcAft>
+              <a:buFontTx/>
+              <a:buChar char="-"/>
+            </a:pPr>
+            <a:r>
+              <a:rPr lang="vi-VN" sz="1400" dirty="0">
+                <a:solidFill>
+                  <a:srgbClr val="444B52"/>
+                </a:solidFill>
+                <a:latin typeface="Arial"/>
+              </a:rPr>
+              <a:t>Phân cụm </a:t>
+            </a:r>
+            <a:r>
+              <a:rPr lang="vi-VN" sz="1400" dirty="0">
+                <a:solidFill>
+                  <a:srgbClr val="444B52"/>
+                </a:solidFill>
+                <a:highlight>
+                  <a:srgbClr val="FFFF00"/>
+                </a:highlight>
+                <a:latin typeface="Arial"/>
+              </a:rPr>
+              <a:t>mềm</a:t>
+            </a:r>
+            <a:r>
+              <a:rPr lang="vi-VN" sz="1400" dirty="0">
+                <a:solidFill>
+                  <a:srgbClr val="444B52"/>
+                </a:solidFill>
+                <a:latin typeface="Arial"/>
+              </a:rPr>
+              <a:t> (một datapoint thuộc 40% cụm này, 30% cụm kia, 30% cụm nọ)</a:t>
+            </a:r>
+          </a:p>
+          <a:p>
+            <a:pPr>
+              <a:spcAft>
+                <a:spcPts val="600"/>
+              </a:spcAft>
+            </a:pPr>
+            <a:endParaRPr lang="en-US" sz="1400" b="1" dirty="0">
+              <a:solidFill>
+                <a:srgbClr val="1B8A7A"/>
+              </a:solidFill>
+              <a:latin typeface="Arial"/>
+            </a:endParaRPr>
+          </a:p>
+          <a:p>
+            <a:pPr>
+              <a:spcAft>
+                <a:spcPts val="600"/>
+              </a:spcAft>
+            </a:pPr>
+            <a:r>
+              <a:rPr lang="en-US" sz="1400" b="1" dirty="0">
+                <a:solidFill>
+                  <a:srgbClr val="1B8A7A"/>
+                </a:solidFill>
+                <a:latin typeface="Arial"/>
+              </a:rPr>
+              <a:t>•  5 </a:t>
+            </a:r>
+            <a:r>
+              <a:rPr lang="en-US" sz="1400" b="1" dirty="0" err="1">
+                <a:solidFill>
+                  <a:srgbClr val="1B8A7A"/>
+                </a:solidFill>
+                <a:latin typeface="Arial"/>
+              </a:rPr>
+              <a:t>nhóm</a:t>
+            </a:r>
+            <a:r>
+              <a:rPr lang="en-US" sz="1400" b="1" dirty="0">
+                <a:solidFill>
+                  <a:srgbClr val="1B8A7A"/>
+                </a:solidFill>
+                <a:latin typeface="Arial"/>
+              </a:rPr>
+              <a:t> </a:t>
+            </a:r>
+            <a:r>
+              <a:rPr lang="en-US" sz="1400" b="1" dirty="0" err="1">
+                <a:solidFill>
+                  <a:srgbClr val="1B8A7A"/>
+                </a:solidFill>
+                <a:latin typeface="Arial"/>
+              </a:rPr>
+              <a:t>thuật</a:t>
+            </a:r>
+            <a:r>
+              <a:rPr lang="en-US" sz="1400" b="1" dirty="0">
+                <a:solidFill>
+                  <a:srgbClr val="1B8A7A"/>
+                </a:solidFill>
+                <a:latin typeface="Arial"/>
+              </a:rPr>
+              <a:t> </a:t>
+            </a:r>
+            <a:r>
+              <a:rPr lang="en-US" sz="1400" b="1" dirty="0" err="1">
+                <a:solidFill>
+                  <a:srgbClr val="1B8A7A"/>
+                </a:solidFill>
+                <a:latin typeface="Arial"/>
+              </a:rPr>
+              <a:t>toán</a:t>
+            </a:r>
+            <a:r>
+              <a:rPr lang="en-US" sz="1400" b="1" dirty="0">
+                <a:solidFill>
+                  <a:srgbClr val="1B8A7A"/>
+                </a:solidFill>
+                <a:latin typeface="Arial"/>
+              </a:rPr>
+              <a:t> </a:t>
+            </a:r>
+            <a:r>
+              <a:rPr lang="en-US" sz="1400" b="1" dirty="0" err="1">
+                <a:solidFill>
+                  <a:srgbClr val="1B8A7A"/>
+                </a:solidFill>
+                <a:latin typeface="Arial"/>
+              </a:rPr>
+              <a:t>phân</a:t>
+            </a:r>
+            <a:r>
+              <a:rPr lang="en-US" sz="1400" b="1" dirty="0">
+                <a:solidFill>
+                  <a:srgbClr val="1B8A7A"/>
+                </a:solidFill>
+                <a:latin typeface="Arial"/>
+              </a:rPr>
+              <a:t> </a:t>
+            </a:r>
+            <a:r>
+              <a:rPr lang="en-US" sz="1400" b="1" dirty="0" err="1">
+                <a:solidFill>
+                  <a:srgbClr val="1B8A7A"/>
+                </a:solidFill>
+                <a:latin typeface="Arial"/>
+              </a:rPr>
+              <a:t>cụm</a:t>
+            </a:r>
+            <a:endParaRPr lang="en-US" sz="1400" b="1" dirty="0">
+              <a:solidFill>
+                <a:srgbClr val="1B8A7A"/>
+              </a:solidFill>
+              <a:latin typeface="Arial"/>
+            </a:endParaRPr>
+          </a:p>
+          <a:p>
+            <a:pPr marL="285750" indent="-285750">
+              <a:spcAft>
+                <a:spcPts val="600"/>
+              </a:spcAft>
+              <a:buFontTx/>
+              <a:buChar char="-"/>
+            </a:pPr>
             <a:r>
               <a:rPr lang="vi-VN" sz="1400" b="1" dirty="0">
                 <a:solidFill>
-                  <a:srgbClr val="1B8A7A"/>
-                </a:solidFill>
-                <a:latin typeface="Arial"/>
-              </a:rPr>
-              <a:t>:</a:t>
+                  <a:srgbClr val="444B52"/>
+                </a:solidFill>
+                <a:latin typeface="Arial"/>
+              </a:rPr>
+              <a:t>Phân cụm </a:t>
+            </a:r>
+            <a:r>
+              <a:rPr lang="vi-VN" sz="1400" b="1" dirty="0">
+                <a:solidFill>
+                  <a:srgbClr val="444B52"/>
+                </a:solidFill>
+                <a:highlight>
+                  <a:srgbClr val="FFFF00"/>
+                </a:highlight>
+                <a:latin typeface="Arial"/>
+              </a:rPr>
+              <a:t>dựa trên phân phối</a:t>
+            </a:r>
+            <a:r>
+              <a:rPr lang="vi-VN" sz="1400" b="1" dirty="0">
+                <a:solidFill>
+                  <a:srgbClr val="444B52"/>
+                </a:solidFill>
+                <a:latin typeface="Arial"/>
+              </a:rPr>
+              <a:t> (Distribution-based) =&gt; GMM thuộc loại này</a:t>
+            </a:r>
+          </a:p>
+          <a:p>
+            <a:pPr marL="285750" indent="-285750">
+              <a:spcAft>
+                <a:spcPts val="600"/>
+              </a:spcAft>
+              <a:buFontTx/>
+              <a:buChar char="-"/>
+            </a:pPr>
+            <a:r>
+              <a:rPr lang="vi-VN" sz="1400" dirty="0">
+                <a:solidFill>
+                  <a:srgbClr val="444B52"/>
+                </a:solidFill>
+                <a:latin typeface="Arial"/>
+              </a:rPr>
+              <a:t>Phân cụm </a:t>
+            </a:r>
+            <a:r>
+              <a:rPr lang="vi-VN" sz="1400" dirty="0">
+                <a:solidFill>
+                  <a:srgbClr val="444B52"/>
+                </a:solidFill>
+                <a:highlight>
+                  <a:srgbClr val="FFFF00"/>
+                </a:highlight>
+                <a:latin typeface="Arial"/>
+              </a:rPr>
+              <a:t>dựa trên mật độ</a:t>
+            </a:r>
+            <a:r>
+              <a:rPr lang="vi-VN" sz="1400" dirty="0">
+                <a:solidFill>
+                  <a:srgbClr val="444B52"/>
+                </a:solidFill>
+                <a:latin typeface="Arial"/>
+              </a:rPr>
+              <a:t> (Density-based)</a:t>
+            </a:r>
+          </a:p>
+          <a:p>
+            <a:pPr marL="285750" indent="-285750">
+              <a:spcAft>
+                <a:spcPts val="600"/>
+              </a:spcAft>
+              <a:buFontTx/>
+              <a:buChar char="-"/>
+            </a:pPr>
+            <a:r>
+              <a:rPr lang="vi-VN" sz="1400" dirty="0">
+                <a:solidFill>
+                  <a:srgbClr val="444B52"/>
+                </a:solidFill>
+                <a:latin typeface="Arial"/>
+              </a:rPr>
+              <a:t>Phân cụm </a:t>
+            </a:r>
+            <a:r>
+              <a:rPr lang="vi-VN" sz="1400" dirty="0">
+                <a:solidFill>
+                  <a:srgbClr val="444B52"/>
+                </a:solidFill>
+                <a:highlight>
+                  <a:srgbClr val="FFFF00"/>
+                </a:highlight>
+                <a:latin typeface="Arial"/>
+              </a:rPr>
+              <a:t>phân hoạch</a:t>
+            </a:r>
+            <a:r>
+              <a:rPr lang="vi-VN" sz="1400" dirty="0">
+                <a:solidFill>
+                  <a:srgbClr val="444B52"/>
+                </a:solidFill>
+                <a:latin typeface="Arial"/>
+              </a:rPr>
+              <a:t> (Partitioning / Centroid-based)</a:t>
+            </a:r>
+          </a:p>
+          <a:p>
+            <a:pPr marL="285750" indent="-285750">
+              <a:spcAft>
+                <a:spcPts val="600"/>
+              </a:spcAft>
+              <a:buFontTx/>
+              <a:buChar char="-"/>
+            </a:pPr>
+            <a:r>
+              <a:rPr lang="vi-VN" sz="1400" dirty="0">
+                <a:solidFill>
+                  <a:srgbClr val="444B52"/>
+                </a:solidFill>
+                <a:latin typeface="Arial"/>
+              </a:rPr>
+              <a:t>Phân cụm </a:t>
+            </a:r>
+            <a:r>
+              <a:rPr lang="vi-VN" sz="1400" dirty="0">
+                <a:solidFill>
+                  <a:srgbClr val="444B52"/>
+                </a:solidFill>
+                <a:highlight>
+                  <a:srgbClr val="FFFF00"/>
+                </a:highlight>
+                <a:latin typeface="Arial"/>
+              </a:rPr>
+              <a:t>phân cấp</a:t>
+            </a:r>
+            <a:r>
+              <a:rPr lang="vi-VN" sz="1400" dirty="0">
+                <a:solidFill>
+                  <a:srgbClr val="444B52"/>
+                </a:solidFill>
+                <a:latin typeface="Arial"/>
+              </a:rPr>
+              <a:t> (Hierarchical / Connectivity-based)</a:t>
+            </a:r>
+          </a:p>
+          <a:p>
+            <a:pPr marL="285750" indent="-285750">
+              <a:spcAft>
+                <a:spcPts val="600"/>
+              </a:spcAft>
+              <a:buFontTx/>
+              <a:buChar char="-"/>
+            </a:pPr>
+            <a:r>
+              <a:rPr lang="vi-VN" sz="1400" dirty="0">
+                <a:solidFill>
+                  <a:srgbClr val="444B52"/>
+                </a:solidFill>
+                <a:latin typeface="Arial"/>
+              </a:rPr>
+              <a:t>Phân cụm </a:t>
+            </a:r>
+            <a:r>
+              <a:rPr lang="vi-VN" sz="1400" dirty="0">
+                <a:solidFill>
+                  <a:srgbClr val="444B52"/>
+                </a:solidFill>
+                <a:highlight>
+                  <a:srgbClr val="FFFF00"/>
+                </a:highlight>
+                <a:latin typeface="Arial"/>
+              </a:rPr>
+              <a:t>phổ</a:t>
+            </a:r>
+            <a:r>
+              <a:rPr lang="vi-VN" sz="1400" dirty="0">
+                <a:solidFill>
+                  <a:srgbClr val="444B52"/>
+                </a:solidFill>
+                <a:latin typeface="Arial"/>
+              </a:rPr>
+              <a:t> (Spectral Clustering)</a:t>
             </a:r>
           </a:p>
         </p:txBody>
@@ -10235,7 +10372,7 @@
         </p:nvSpPr>
         <p:spPr>
           <a:xfrm>
-            <a:off x="502919" y="1476079"/>
+            <a:off x="502919" y="1374479"/>
             <a:ext cx="11185855" cy="5155257"/>
           </a:xfrm>
           <a:prstGeom prst="rect">
@@ -12177,8 +12314,8 @@
           </a:p>
         </p:txBody>
       </p:sp>
-      <mc:AlternateContent xmlns:mc="http://schemas.openxmlformats.org/markup-compatibility/2006" xmlns:a14="http://schemas.microsoft.com/office/drawing/2010/main">
-        <mc:Choice Requires="a14">
+      <mc:AlternateContent xmlns:mc="http://schemas.openxmlformats.org/markup-compatibility/2006">
+        <mc:Choice xmlns:a14="http://schemas.microsoft.com/office/drawing/2010/main" Requires="a14">
           <p:sp>
             <p:nvSpPr>
               <p:cNvPr id="11" name="TextBox 10">
@@ -12235,7 +12372,25 @@
                     </a:solidFill>
                     <a:latin typeface="Arial"/>
                   </a:rPr>
-                  <a:t>	GMM = </a:t>
+                  <a:t>	</a:t>
+                </a:r>
+                <a:r>
+                  <a:rPr lang="vi-VN" sz="1400" b="1" dirty="0">
+                    <a:solidFill>
+                      <a:srgbClr val="444B52"/>
+                    </a:solidFill>
+                    <a:latin typeface="Arial"/>
+                  </a:rPr>
+                  <a:t>GMM</a:t>
+                </a:r>
+                <a:r>
+                  <a:rPr lang="vi-VN" sz="1400" dirty="0">
+                    <a:solidFill>
+                      <a:srgbClr val="444B52"/>
+                    </a:solidFill>
+                    <a:latin typeface="Arial"/>
+                  </a:rPr>
+                  <a:t> = </a:t>
                 </a:r>
                 <a:r>
                   <a:rPr lang="vi-VN" sz="1400" dirty="0">
@@ -12529,10 +12684,22 @@
                     </a:solidFill>
                     <a:latin typeface="Arial"/>
                   </a:rPr>
-                  <a:t>	trọngSố</a:t>
+                  <a:t>		</a:t>
                 </a:r>
                 <a:r>
-                  <a:rPr lang="vi-VN" sz="1400" baseline="-25000" dirty="0">
+                  <a:rPr lang="vi-VN" sz="1200" dirty="0">
+                    <a:solidFill>
+                      <a:schemeClr val="tx2">
+                        <a:lumMod val="60000"/>
+                        <a:lumOff val="40000"/>
+                      </a:schemeClr>
+                    </a:solidFill>
+                    <a:latin typeface="Arial"/>
+                  </a:rPr>
+                  <a:t>trọngSố</a:t>
+                </a:r>
+                <a:r>
+                  <a:rPr lang="vi-VN" sz="1200" baseline="-25000" dirty="0">
                     <a:solidFill>
                       <a:schemeClr val="tx2">
                         <a:lumMod val="60000"/>
@@ -12544,7 +12711,7 @@
                   <a:t>k</a:t>
                 </a:r>
                 <a:r>
-                  <a:rPr lang="vi-VN" sz="1400" dirty="0">
+                  <a:rPr lang="vi-VN" sz="1200" dirty="0">
                     <a:solidFill>
                       <a:schemeClr val="tx2">
                         <a:lumMod val="60000"/>
@@ -12556,13 +12723,13 @@
                   <a:t> </a:t>
                 </a:r>
                 <a:r>
-                  <a:rPr lang="vi-VN" sz="1400" dirty="0">
+                  <a:rPr lang="vi-VN" sz="1200" dirty="0">
                     <a:latin typeface="Arial"/>
                   </a:rPr>
                   <a:t>kí hiệu là Pi:</a:t>
                 </a:r>
                 <a:r>
-                  <a:rPr lang="vi-VN" sz="1400" dirty="0">
+                  <a:rPr lang="vi-VN" sz="1200" dirty="0">
                     <a:solidFill>
                       <a:schemeClr val="tx2">
                         <a:lumMod val="60000"/>
@@ -12578,7 +12745,7 @@
                     <m:sSub>
                       <m:sSubPr>
                         <m:ctrlPr>
-                          <a:rPr lang="en-US" sz="1400" i="1">
+                          <a:rPr lang="en-US" sz="1200" i="1">
                             <a:solidFill>
                               <a:schemeClr val="tx2">
                                 <a:lumMod val="60000"/>
@@ -12591,7 +12758,7 @@
                       </m:sSubPr>
                       <m:e>
                         <m:r>
-                          <a:rPr lang="en-US" sz="1400" i="1">
+                          <a:rPr lang="en-US" sz="1200" i="1">
                             <a:solidFill>
                               <a:schemeClr val="tx2">
                                 <a:lumMod val="60000"/>
@@ -12605,7 +12772,7 @@
                       </m:e>
                       <m:sub>
                         <m:r>
-                          <a:rPr lang="en-US" sz="1400" i="1">
+                          <a:rPr lang="en-US" sz="1200" i="1">
                             <a:solidFill>
                               <a:schemeClr val="tx2">
                                 <a:lumMod val="60000"/>
@@ -12621,7 +12788,7 @@
                   </m:oMath>
                 </a14:m>
                 <a:r>
-                  <a:rPr lang="vi-VN" sz="1400" b="1" dirty="0">
+                  <a:rPr lang="vi-VN" sz="1200" b="1" dirty="0">
                     <a:solidFill>
                       <a:schemeClr val="accent6">
                         <a:lumMod val="75000"/>
@@ -12632,24 +12799,24 @@
                   <a:t> </a:t>
                 </a:r>
                 <a:r>
-                  <a:rPr lang="vi-VN" sz="1400" dirty="0">
+                  <a:rPr lang="vi-VN" sz="1200" dirty="0">
                     <a:latin typeface="Arial"/>
                   </a:rPr>
                   <a:t>(</a:t>
                 </a:r>
                 <a:r>
-                  <a:rPr lang="vi-VN" sz="1400" b="1" dirty="0">
+                  <a:rPr lang="vi-VN" sz="1200" b="1" dirty="0">
                     <a:latin typeface="Arial"/>
                   </a:rPr>
                   <a:t>P</a:t>
                 </a:r>
                 <a:r>
-                  <a:rPr lang="vi-VN" sz="1400" dirty="0">
+                  <a:rPr lang="vi-VN" sz="1200" dirty="0">
                     <a:latin typeface="Arial"/>
                   </a:rPr>
                   <a:t>robability)</a:t>
                 </a:r>
-                <a:endParaRPr lang="vi-VN" sz="1400" b="1" dirty="0">
+                <a:endParaRPr lang="vi-VN" sz="1200" b="1" dirty="0">
                   <a:solidFill>
                     <a:schemeClr val="accent6">
                       <a:lumMod val="75000"/>
@@ -12665,7 +12832,7 @@
                   </a:spcAft>
                 </a:pPr>
                 <a:r>
-                  <a:rPr lang="vi-VN" sz="1400" dirty="0">
+                  <a:rPr lang="vi-VN" sz="1200" dirty="0">
                     <a:solidFill>
                       <a:schemeClr val="accent6">
                         <a:lumMod val="75000"/>
@@ -12673,10 +12840,10 @@
                     </a:solidFill>
                     <a:latin typeface="Arial"/>
                   </a:rPr>
-                  <a:t>	chuông</a:t>
+                  <a:t>		chuông</a:t>
                 </a:r>
                 <a:r>
-                  <a:rPr lang="vi-VN" sz="1400" baseline="-25000" dirty="0">
+                  <a:rPr lang="vi-VN" sz="1200" baseline="-25000" dirty="0">
                     <a:solidFill>
                       <a:schemeClr val="accent6">
                         <a:lumMod val="75000"/>
@@ -12687,7 +12854,7 @@
                   <a:t>k</a:t>
                 </a:r>
                 <a:r>
-                  <a:rPr lang="vi-VN" sz="1400" dirty="0">
+                  <a:rPr lang="vi-VN" sz="1200" dirty="0">
                     <a:solidFill>
                       <a:schemeClr val="accent6">
                         <a:lumMod val="75000"/>
@@ -12698,7 +12865,7 @@
                   <a:t> </a:t>
                 </a:r>
                 <a:r>
-                  <a:rPr lang="vi-VN" sz="1400" dirty="0">
+                  <a:rPr lang="vi-VN" sz="1200" dirty="0">
                     <a:latin typeface="Arial"/>
                   </a:rPr>
                   <a:t>kí hiệu là N: </a:t>
@@ -12706,7 +12873,7 @@
                 <a14:m>
                   <m:oMath xmlns:m="http://schemas.openxmlformats.org/officeDocument/2006/math">
                     <m:r>
-                      <a:rPr lang="en-US" sz="1400" i="1">
+                      <a:rPr lang="en-US" sz="1200" i="1">
                         <a:solidFill>
                           <a:schemeClr val="accent6">
                             <a:lumMod val="75000"/>
@@ -12719,7 +12886,7 @@
                     <m:d>
                       <m:dPr>
                         <m:ctrlPr>
-                          <a:rPr lang="en-US" sz="1400" i="1">
+                          <a:rPr lang="en-US" sz="1200" i="1">
                             <a:solidFill>
                               <a:schemeClr val="accent6">
                                 <a:lumMod val="75000"/>
@@ -12731,7 +12898,7 @@
                       </m:dPr>
                       <m:e>
                         <m:r>
-                          <a:rPr lang="en-US" sz="1400" i="1">
+                          <a:rPr lang="en-US" sz="1200" i="1">
                             <a:solidFill>
                               <a:schemeClr val="accent6">
                                 <a:lumMod val="75000"/>
@@ -12742,7 +12909,7 @@
                           <m:t>𝑥</m:t>
                         </m:r>
                         <m:r>
-                          <a:rPr lang="en-US" sz="1400" i="1">
+                          <a:rPr lang="en-US" sz="1200" i="1">
                             <a:solidFill>
                               <a:schemeClr val="accent6">
                                 <a:lumMod val="75000"/>
@@ -12755,7 +12922,7 @@
                         <m:sSub>
                           <m:sSubPr>
                             <m:ctrlPr>
-                              <a:rPr lang="vi-VN" sz="1400" i="1">
+                              <a:rPr lang="vi-VN" sz="1200" i="1">
                                 <a:solidFill>
                                   <a:schemeClr val="accent6">
                                     <a:lumMod val="75000"/>
@@ -12767,7 +12934,7 @@
                           </m:sSubPr>
                           <m:e>
                             <m:r>
-                              <a:rPr lang="vi-VN" sz="1400" i="1">
+                              <a:rPr lang="vi-VN" sz="1200" i="1">
                                 <a:solidFill>
                                   <a:schemeClr val="accent6">
                                     <a:lumMod val="75000"/>
@@ -12778,7 +12945,7 @@
                               <m:t>(</m:t>
                             </m:r>
                             <m:r>
-                              <a:rPr lang="en-US" sz="1400" i="1">
+                              <a:rPr lang="en-US" sz="1200" i="1">
                                 <a:solidFill>
                                   <a:schemeClr val="accent6">
                                     <a:lumMod val="75000"/>
@@ -12791,7 +12958,7 @@
                           </m:e>
                           <m:sub>
                             <m:r>
-                              <a:rPr lang="en-US" sz="1400" i="1">
+                              <a:rPr lang="en-US" sz="1200" i="1">
                                 <a:solidFill>
                                   <a:schemeClr val="accent6">
                                     <a:lumMod val="75000"/>
@@ -12804,7 +12971,7 @@
                           </m:sub>
                         </m:sSub>
                         <m:r>
-                          <a:rPr lang="en-US" sz="1400" i="1">
+                          <a:rPr lang="en-US" sz="1200" i="1">
                             <a:solidFill>
                               <a:schemeClr val="accent6">
                                 <a:lumMod val="75000"/>
@@ -12817,7 +12984,7 @@
                         <m:sSubSup>
                           <m:sSubSupPr>
                             <m:ctrlPr>
-                              <a:rPr lang="en-US" sz="1400" i="1">
+                              <a:rPr lang="en-US" sz="1200" i="1">
                                 <a:solidFill>
                                   <a:schemeClr val="accent6">
                                     <a:lumMod val="75000"/>
@@ -12829,7 +12996,7 @@
                           </m:sSubSupPr>
                           <m:e>
                             <m:r>
-                              <a:rPr lang="en-US" sz="1400" i="1">
+                              <a:rPr lang="en-US" sz="1200" i="1">
                                 <a:solidFill>
                                   <a:schemeClr val="accent6">
                                     <a:lumMod val="75000"/>
@@ -12842,7 +13009,7 @@
                           </m:e>
                           <m:sub>
                             <m:r>
-                              <a:rPr lang="en-US" sz="1400" i="1">
+                              <a:rPr lang="en-US" sz="1200" i="1">
                                 <a:solidFill>
                                   <a:schemeClr val="accent6">
                                     <a:lumMod val="75000"/>
@@ -12855,7 +13022,7 @@
                           </m:sub>
                           <m:sup>
                             <m:r>
-                              <a:rPr lang="en-US" sz="1400" i="1">
+                              <a:rPr lang="en-US" sz="1200" i="1">
                                 <a:solidFill>
                                   <a:schemeClr val="accent6">
                                     <a:lumMod val="75000"/>
@@ -12868,7 +13035,7 @@
                           </m:sup>
                         </m:sSubSup>
                         <m:r>
-                          <a:rPr lang="vi-VN" sz="1400" i="1">
+                          <a:rPr lang="vi-VN" sz="1200" i="1">
                             <a:solidFill>
                               <a:schemeClr val="accent6">
                                 <a:lumMod val="75000"/>
@@ -12883,7 +13050,7 @@
                   </m:oMath>
                 </a14:m>
                 <a:r>
-                  <a:rPr lang="vi-VN" sz="1400" b="1" dirty="0">
+                  <a:rPr lang="vi-VN" sz="1200" b="1" dirty="0">
                     <a:solidFill>
                       <a:schemeClr val="accent6">
                         <a:lumMod val="75000"/>
@@ -12894,24 +13061,24 @@
                   <a:t> </a:t>
                 </a:r>
                 <a:r>
-                  <a:rPr lang="vi-VN" sz="1400" dirty="0">
+                  <a:rPr lang="vi-VN" sz="1200" dirty="0">
                     <a:latin typeface="Arial"/>
                   </a:rPr>
                   <a:t>(</a:t>
                 </a:r>
                 <a:r>
-                  <a:rPr lang="vi-VN" sz="1400" b="1" dirty="0">
+                  <a:rPr lang="vi-VN" sz="1200" b="1" dirty="0">
                     <a:latin typeface="Arial"/>
                   </a:rPr>
                   <a:t>N</a:t>
                 </a:r>
                 <a:r>
-                  <a:rPr lang="vi-VN" sz="1400" dirty="0">
+                  <a:rPr lang="vi-VN" sz="1200" dirty="0">
                     <a:latin typeface="Arial"/>
                   </a:rPr>
                   <a:t>ormal Distribution)</a:t>
                 </a:r>
-                <a:endParaRPr lang="vi-VN" sz="1400" b="1" dirty="0">
+                <a:endParaRPr lang="vi-VN" sz="1200" b="1" dirty="0">
                   <a:solidFill>
                     <a:schemeClr val="accent6">
                       <a:lumMod val="75000"/>
@@ -13222,7 +13389,7 @@
             </p:txBody>
           </p:sp>
         </mc:Choice>
-        <mc:Fallback xmlns="">
+        <mc:Fallback>
           <p:sp>
             <p:nvSpPr>
               <p:cNvPr id="11" name="TextBox 10">
@@ -15285,8 +15452,8 @@
           </a:p>
         </p:txBody>
       </p:sp>
-      <mc:AlternateContent xmlns:mc="http://schemas.openxmlformats.org/markup-compatibility/2006" xmlns:a14="http://schemas.microsoft.com/office/drawing/2010/main">
-        <mc:Choice Requires="a14">
+      <mc:AlternateContent xmlns:mc="http://schemas.openxmlformats.org/markup-compatibility/2006">
+        <mc:Choice xmlns:a14="http://schemas.microsoft.com/office/drawing/2010/main" Requires="a14">
           <p:sp>
             <p:nvSpPr>
               <p:cNvPr id="25" name="TextBox 24">
@@ -15308,6 +15475,11 @@
                 <a:avLst/>
               </a:prstGeom>
               <a:noFill/>
+              <a:ln w="12700">
+                <a:solidFill>
+                  <a:schemeClr val="accent1"/>
+                </a:solidFill>
+              </a:ln>
             </p:spPr>
             <p:txBody>
               <a:bodyPr wrap="none" lIns="0" tIns="0" rIns="0" bIns="0" rtlCol="0">
@@ -15419,12 +15591,12 @@
                     </m:oMath>
                   </m:oMathPara>
                 </a14:m>
-                <a:endParaRPr/>
+                <a:endParaRPr dirty="0"/>
               </a:p>
             </p:txBody>
           </p:sp>
         </mc:Choice>
-        <mc:Fallback xmlns="">
+        <mc:Fallback>
           <p:sp>
             <p:nvSpPr>
               <p:cNvPr id="25" name="TextBox 24">
@@ -15450,9 +15622,14 @@
               <a:blipFill>
                 <a:blip r:embed="rId4"/>
                 <a:stretch>
-                  <a:fillRect l="-4110" t="-77778" r="-13699" b="-77778"/>
+                  <a:fillRect l="-4110" t="-77778" r="-1370" b="-77778"/>
                 </a:stretch>
               </a:blipFill>
+              <a:ln w="12700">
+                <a:solidFill>
+                  <a:schemeClr val="accent1"/>
+                </a:solidFill>
+              </a:ln>
             </p:spPr>
             <p:txBody>
               <a:bodyPr/>
@@ -15469,8 +15646,8 @@
           </p:sp>
         </mc:Fallback>
       </mc:AlternateContent>
-      <mc:AlternateContent xmlns:mc="http://schemas.openxmlformats.org/markup-compatibility/2006" xmlns:a14="http://schemas.microsoft.com/office/drawing/2010/main">
-        <mc:Choice Requires="a14">
+      <mc:AlternateContent xmlns:mc="http://schemas.openxmlformats.org/markup-compatibility/2006">
+        <mc:Choice xmlns:a14="http://schemas.microsoft.com/office/drawing/2010/main" Requires="a14">
           <p:sp>
             <p:nvSpPr>
               <p:cNvPr id="30" name="TextBox 29">
@@ -15492,6 +15669,11 @@
                 <a:avLst/>
               </a:prstGeom>
               <a:noFill/>
+              <a:ln w="12700">
+                <a:solidFill>
+                  <a:schemeClr val="accent1"/>
+                </a:solidFill>
+              </a:ln>
             </p:spPr>
             <p:txBody>
               <a:bodyPr wrap="none" lIns="0" tIns="0" rIns="0" bIns="0" rtlCol="0">
@@ -15666,7 +15848,7 @@
             </p:txBody>
           </p:sp>
         </mc:Choice>
-        <mc:Fallback xmlns="">
+        <mc:Fallback>
           <p:sp>
             <p:nvSpPr>
               <p:cNvPr id="30" name="TextBox 29">
@@ -15692,9 +15874,14 @@
               <a:blipFill>
                 <a:blip r:embed="rId5"/>
                 <a:stretch>
-                  <a:fillRect l="-1600" t="-39216" r="-7200" b="-43137"/>
+                  <a:fillRect l="-1600" t="-39216" r="-800" b="-43137"/>
                 </a:stretch>
               </a:blipFill>
+              <a:ln w="12700">
+                <a:solidFill>
+                  <a:schemeClr val="accent1"/>
+                </a:solidFill>
+              </a:ln>
             </p:spPr>
             <p:txBody>
               <a:bodyPr/>
@@ -15711,36 +15898,6 @@
           </p:sp>
         </mc:Fallback>
       </mc:AlternateContent>
-      <p:pic>
-        <p:nvPicPr>
-          <p:cNvPr id="31" name="Picture 30" descr="Standard normal distribution - Learning Lab - RMIT University">
-            <a:extLst>
-              <a:ext uri="{FF2B5EF4-FFF2-40B4-BE49-F238E27FC236}">
-                <a16:creationId xmlns:a16="http://schemas.microsoft.com/office/drawing/2014/main" id="{8FCDA107-C53C-483F-88BB-EA76EBFAA516}"/>
-              </a:ext>
-            </a:extLst>
-          </p:cNvPr>
-          <p:cNvPicPr>
-            <a:picLocks noChangeAspect="1"/>
-          </p:cNvPicPr>
-          <p:nvPr/>
-        </p:nvPicPr>
-        <p:blipFill>
-          <a:blip r:embed="rId6"/>
-          <a:stretch>
-            <a:fillRect/>
-          </a:stretch>
-        </p:blipFill>
-        <p:spPr>
-          <a:xfrm>
-            <a:off x="364067" y="2955703"/>
-            <a:ext cx="5152196" cy="2634525"/>
-          </a:xfrm>
-          <a:prstGeom prst="rect">
-            <a:avLst/>
-          </a:prstGeom>
-        </p:spPr>
-      </p:pic>
       <p:sp>
         <p:nvSpPr>
           <p:cNvPr id="34" name="TextBox 33">
@@ -15979,7 +16136,7 @@
                     </m:oMath>
                   </m:oMathPara>
                 </a14:m>
-                <a:endParaRPr/>
+                <a:endParaRPr dirty="0"/>
               </a:p>
             </p:txBody>
           </p:sp>
@@ -16029,6 +16186,36 @@
           </p:sp>
         </mc:Fallback>
       </mc:AlternateContent>
+      <p:pic>
+        <p:nvPicPr>
+          <p:cNvPr id="8" name="Picture 7">
+            <a:extLst>
+              <a:ext uri="{FF2B5EF4-FFF2-40B4-BE49-F238E27FC236}">
+                <a16:creationId xmlns:a16="http://schemas.microsoft.com/office/drawing/2014/main" id="{172684AB-392C-2F5F-4B62-B306A7BC8AC9}"/>
+              </a:ext>
+            </a:extLst>
+          </p:cNvPr>
+          <p:cNvPicPr>
+            <a:picLocks noChangeAspect="1"/>
+          </p:cNvPicPr>
+          <p:nvPr/>
+        </p:nvPicPr>
+        <p:blipFill>
+          <a:blip r:embed="rId8"/>
+          <a:stretch>
+            <a:fillRect/>
+          </a:stretch>
+        </p:blipFill>
+        <p:spPr>
+          <a:xfrm>
+            <a:off x="187781" y="2207259"/>
+            <a:ext cx="5593644" cy="4324035"/>
+          </a:xfrm>
+          <a:prstGeom prst="rect">
+            <a:avLst/>
+          </a:prstGeom>
+        </p:spPr>
+      </p:pic>
     </p:spTree>
   </p:cSld>
   <p:clrMapOvr>
